--- a/sunum/Kampus_IT_Helpdesk_Suunum (1).pptx
+++ b/sunum/Kampus_IT_Helpdesk_Suunum (1).pptx
@@ -1635,7 +1635,7 @@
         </p:nvSpPr>
         <p:spPr>
           <a:xfrm>
-            <a:off x="457200" y="1463040"/>
+            <a:off x="457201" y="1463040"/>
             <a:ext cx="3931920" cy="2926080"/>
           </a:xfrm>
           <a:prstGeom prst="rect">
@@ -1648,73 +1648,31 @@
           <a:bodyPr wrap="square" lIns="0" tIns="0" rIns="0" bIns="0" rtlCol="0" anchor="t"/>
           <a:lstStyle/>
           <a:p>
-            <a:pPr marL="342900" indent="-342900">
+            <a:r>
+              <a:rPr lang="tr-TR" sz="1200" dirty="0"/>
+              <a:t>Kampüste yaşanan internet bağlantısı, bilgisayar, projeksiyon, yazıcı, laboratuvar ekipmanı vb. teknik arızalar çoğu zaman telefon, e-posta ya da sözlü olarak bildiriliyor. Bildirimler farklı kanallarda kaldığı için hangi arızanın ne zaman iletildiğini, kimin ilgilendiğini ve çözümün hangi aşamada olduğunu takip etmek zorlaşıyor. Aynı sorun birden fazla kez bildirilebiliyor; acil arızalar da diğer taleplerin arasından kolayca gözden kaçabiliyor.</a:t>
+            </a:r>
+          </a:p>
+          <a:p>
+            <a:endParaRPr lang="tr-TR" sz="1200" dirty="0"/>
+          </a:p>
+          <a:p>
+            <a:r>
+              <a:rPr lang="tr-TR" sz="1200" dirty="0"/>
+              <a:t>Bu proje kapsamında öğrenciler ve personel, arızayı tek bir platform üzerinden bildirecek. Bildirim sırasında arıza kategorisi, bulunduğu bina ve oda, açıklama ve gerekirse görsel eklenecek. Böylece teknik ekip sorunun nerede olduğunu ve müdahale için hangi bilgilere ihtiyaç duyduğunu baştan görebilecek. Talepler “Yeni”, “İnceleniyor”, “İşlemde” ve “Çözüldü” gibi durumlarla izlenecek; bildirim sahibi de talebinin son durumunu sistemden takip edebilecek</a:t>
+            </a:r>
+            <a:r>
+              <a:rPr lang="tr-TR" sz="1400" dirty="0"/>
+              <a:t>.</a:t>
+            </a:r>
+          </a:p>
+          <a:p>
+            <a:pPr>
               <a:spcAft>
                 <a:spcPts val="1000"/>
               </a:spcAft>
               <a:buSzPct val="100000"/>
-              <a:buChar char="•"/>
             </a:pPr>
-            <a:r>
-              <a:rPr lang="en-US" sz="1400" dirty="0">
-                <a:solidFill>
-                  <a:srgbClr val="222222"/>
-                </a:solidFill>
-              </a:rPr>
-              <a:t>Laboratuvar, projeksiyon ve Wi-Fi arızaları WhatsApp veya sözlü iletilmektedir.</a:t>
-            </a:r>
-            <a:endParaRPr lang="en-US" sz="1400" dirty="0"/>
-          </a:p>
-          <a:p>
-            <a:pPr marL="342900" indent="-342900">
-              <a:spcAft>
-                <a:spcPts val="1000"/>
-              </a:spcAft>
-              <a:buSzPct val="100000"/>
-              <a:buChar char="•"/>
-            </a:pPr>
-            <a:r>
-              <a:rPr lang="en-US" sz="1400" dirty="0">
-                <a:solidFill>
-                  <a:srgbClr val="222222"/>
-                </a:solidFill>
-              </a:rPr>
-              <a:t>Bu durum takibi zorlaştırmakta ve iletişim kopukluğu yaratmaktadır.</a:t>
-            </a:r>
-            <a:endParaRPr lang="en-US" sz="1400" dirty="0"/>
-          </a:p>
-          <a:p>
-            <a:pPr marL="342900" indent="-342900">
-              <a:spcAft>
-                <a:spcPts val="1000"/>
-              </a:spcAft>
-              <a:buSzPct val="100000"/>
-              <a:buChar char="•"/>
-            </a:pPr>
-            <a:r>
-              <a:rPr lang="en-US" sz="1400" dirty="0">
-                <a:solidFill>
-                  <a:srgbClr val="222222"/>
-                </a:solidFill>
-              </a:rPr>
-              <a:t>Çözüm: Fotoğraflı ve durum takipli arıza kayıt (Ticket) </a:t>
-            </a:r>
-            <a:r>
-              <a:rPr lang="en-US" sz="1400" dirty="0" err="1">
-                <a:solidFill>
-                  <a:srgbClr val="222222"/>
-                </a:solidFill>
-              </a:rPr>
-              <a:t>sistemi</a:t>
-            </a:r>
-            <a:r>
-              <a:rPr lang="en-US" sz="1400" dirty="0">
-                <a:solidFill>
-                  <a:srgbClr val="222222"/>
-                </a:solidFill>
-              </a:rPr>
-              <a:t>.</a:t>
-            </a:r>
             <a:endParaRPr lang="en-US" sz="1400" dirty="0"/>
           </a:p>
         </p:txBody>
@@ -1748,22 +1706,50 @@
               <a:buChar char="•"/>
             </a:pPr>
             <a:r>
-              <a:rPr lang="en-US" sz="1400" b="1" dirty="0">
+              <a:rPr lang="tr-TR" sz="1200" b="1" dirty="0" err="1">
                 <a:solidFill>
                   <a:srgbClr val="222222"/>
                 </a:solidFill>
               </a:rPr>
-              <a:t>React (Vite): </a:t>
+              <a:t>Frontend</a:t>
             </a:r>
             <a:r>
-              <a:rPr lang="en-US" sz="1400" dirty="0">
+              <a:rPr lang="tr-TR" sz="1200" b="1" dirty="0">
                 <a:solidFill>
                   <a:srgbClr val="222222"/>
                 </a:solidFill>
               </a:rPr>
-              <a:t>Hızlı ve etkileşimli kullanıcı arayüzü.</a:t>
+              <a:t> (Arayüz): </a:t>
             </a:r>
-            <a:endParaRPr lang="en-US" sz="1400" dirty="0"/>
+            <a:r>
+              <a:rPr lang="tr-TR" sz="1200" dirty="0" err="1">
+                <a:solidFill>
+                  <a:srgbClr val="222222"/>
+                </a:solidFill>
+              </a:rPr>
+              <a:t>React</a:t>
+            </a:r>
+            <a:r>
+              <a:rPr lang="tr-TR" sz="1200" dirty="0">
+                <a:solidFill>
+                  <a:srgbClr val="222222"/>
+                </a:solidFill>
+              </a:rPr>
+              <a:t> + </a:t>
+            </a:r>
+            <a:r>
+              <a:rPr lang="tr-TR" sz="1200" dirty="0" err="1">
+                <a:solidFill>
+                  <a:srgbClr val="222222"/>
+                </a:solidFill>
+              </a:rPr>
+              <a:t>Vite</a:t>
+            </a:r>
+            <a:endParaRPr lang="tr-TR" sz="1200" dirty="0">
+              <a:solidFill>
+                <a:srgbClr val="222222"/>
+              </a:solidFill>
+            </a:endParaRPr>
           </a:p>
           <a:p>
             <a:pPr marL="342900" indent="-342900">
@@ -1774,22 +1760,25 @@
               <a:buChar char="•"/>
             </a:pPr>
             <a:r>
-              <a:rPr lang="en-US" sz="1400" b="1" dirty="0">
-                <a:solidFill>
-                  <a:srgbClr val="222222"/>
-                </a:solidFill>
-              </a:rPr>
-              <a:t>C# .NET Core Web API: </a:t>
+              <a:rPr lang="tr-TR" sz="1200" b="1" dirty="0" err="1"/>
+              <a:t>Backend</a:t>
             </a:r>
             <a:r>
-              <a:rPr lang="en-US" sz="1400" dirty="0">
-                <a:solidFill>
-                  <a:srgbClr val="222222"/>
-                </a:solidFill>
-              </a:rPr>
-              <a:t>Güvenli ve katmanlı API altyapısı.</a:t>
+              <a:rPr lang="tr-TR" sz="1200" b="1" dirty="0"/>
+              <a:t> (Sunucu):</a:t>
             </a:r>
-            <a:endParaRPr lang="en-US" sz="1400" dirty="0"/>
+            <a:r>
+              <a:rPr lang="tr-TR" sz="1200" dirty="0"/>
+              <a:t> C# .NET </a:t>
+            </a:r>
+            <a:r>
+              <a:rPr lang="tr-TR" sz="1200" dirty="0" err="1"/>
+              <a:t>Core</a:t>
+            </a:r>
+            <a:r>
+              <a:rPr lang="tr-TR" sz="1200" dirty="0"/>
+              <a:t> - Güvenli ve sağlam bir API altyapısı kurmak için.</a:t>
+            </a:r>
           </a:p>
           <a:p>
             <a:pPr marL="342900" indent="-342900">
@@ -1800,22 +1789,17 @@
               <a:buChar char="•"/>
             </a:pPr>
             <a:r>
-              <a:rPr lang="en-US" sz="1400" b="1" dirty="0">
-                <a:solidFill>
-                  <a:srgbClr val="222222"/>
-                </a:solidFill>
-              </a:rPr>
-              <a:t>MSSQL Server ve EF Core: </a:t>
+              <a:rPr lang="tr-TR" sz="1200" b="1" dirty="0" err="1"/>
+              <a:t>Veritabanı</a:t>
             </a:r>
             <a:r>
-              <a:rPr lang="en-US" sz="1400" dirty="0">
-                <a:solidFill>
-                  <a:srgbClr val="222222"/>
-                </a:solidFill>
-              </a:rPr>
-              <a:t>Arıza ve kullanıcı verilerinin ilişkisel yönetimi.</a:t>
+              <a:rPr lang="tr-TR" sz="1200" b="1" dirty="0"/>
+              <a:t>:</a:t>
             </a:r>
-            <a:endParaRPr lang="en-US" sz="1400" dirty="0"/>
+            <a:r>
+              <a:rPr lang="tr-TR" sz="1200" dirty="0"/>
+              <a:t> MS SQL Server - Arıza ve kullanıcı kayıtlarımızı düzenli tutmak için.</a:t>
+            </a:r>
           </a:p>
           <a:p>
             <a:pPr marL="342900" indent="-342900">
@@ -1826,22 +1810,22 @@
               <a:buChar char="•"/>
             </a:pPr>
             <a:r>
-              <a:rPr lang="en-US" sz="1400" b="1" dirty="0">
-                <a:solidFill>
-                  <a:srgbClr val="222222"/>
-                </a:solidFill>
-              </a:rPr>
-              <a:t>ASP.NET Core Identity: </a:t>
+              <a:rPr lang="tr-TR" sz="1200" b="1" dirty="0"/>
+              <a:t>Güvenlik / Yetkilendirme:</a:t>
             </a:r>
             <a:r>
-              <a:rPr lang="en-US" sz="1400" dirty="0">
-                <a:solidFill>
-                  <a:srgbClr val="222222"/>
-                </a:solidFill>
-              </a:rPr>
-              <a:t>Hazır şifreleme (Hash) ve rol bazlı yetkilendirme.</a:t>
+              <a:rPr lang="tr-TR" sz="1200" dirty="0"/>
+              <a:t> ASP.NET </a:t>
             </a:r>
-            <a:endParaRPr lang="en-US" sz="1400" dirty="0"/>
+            <a:r>
+              <a:rPr lang="tr-TR" sz="1200" dirty="0" err="1"/>
+              <a:t>Core</a:t>
+            </a:r>
+            <a:r>
+              <a:rPr lang="tr-TR" sz="1200" dirty="0"/>
+              <a:t> Identity - Şifre güvenliği ve rol (Admin/Öğrenci) ayrımını sağlamak için.</a:t>
+            </a:r>
+            <a:endParaRPr lang="en-US" sz="1200" dirty="0"/>
           </a:p>
         </p:txBody>
       </p:sp>
@@ -1980,12 +1964,28 @@
               <a:buNone/>
             </a:pPr>
             <a:r>
+              <a:rPr lang="en-US" sz="1400" b="1" dirty="0" err="1">
+                <a:solidFill>
+                  <a:srgbClr val="1F3A5F"/>
+                </a:solidFill>
+              </a:rPr>
+              <a:t>Fonksiyonel</a:t>
+            </a:r>
+            <a:r>
               <a:rPr lang="en-US" sz="1400" b="1" dirty="0">
                 <a:solidFill>
                   <a:srgbClr val="1F3A5F"/>
                 </a:solidFill>
               </a:rPr>
-              <a:t>Fonksiyonel Gereksinimler</a:t>
+              <a:t> </a:t>
+            </a:r>
+            <a:r>
+              <a:rPr lang="en-US" sz="1400" b="1" dirty="0" err="1">
+                <a:solidFill>
+                  <a:srgbClr val="1F3A5F"/>
+                </a:solidFill>
+              </a:rPr>
+              <a:t>Gereksinimler</a:t>
             </a:r>
             <a:endParaRPr lang="en-US" sz="1400" dirty="0"/>
           </a:p>
@@ -2084,127 +2084,53 @@
           <a:bodyPr wrap="square" lIns="0" tIns="0" rIns="0" bIns="0" rtlCol="0" anchor="t"/>
           <a:lstStyle/>
           <a:p>
-            <a:pPr marL="0" indent="0">
+            <a:pPr marL="171450" indent="-171450">
               <a:spcAft>
                 <a:spcPts val="500"/>
               </a:spcAft>
-              <a:buNone/>
+              <a:buFont typeface="Arial" panose="020B0604020202020204" pitchFamily="34" charset="0"/>
+              <a:buChar char="•"/>
             </a:pPr>
             <a:r>
-              <a:rPr lang="en-US" sz="1150" b="1" dirty="0">
-                <a:solidFill>
-                  <a:srgbClr val="222222"/>
-                </a:solidFill>
-              </a:rPr>
-              <a:t>Bilgi İşlem Personeli (Süper Admin)</a:t>
+              <a:rPr lang="tr-TR" sz="1200" b="1" dirty="0"/>
+              <a:t>Kullanıcılar (Öğrenci/Akademisyen):</a:t>
             </a:r>
-            <a:endParaRPr lang="en-US" sz="1150" dirty="0"/>
+            <a:r>
+              <a:rPr lang="tr-TR" sz="1200" dirty="0"/>
+              <a:t> Konum seçip fotoğraf yükleyerek arıza kaydı açar ve durumunu izler.</a:t>
+            </a:r>
           </a:p>
           <a:p>
-            <a:pPr marL="342900" indent="-342900">
+            <a:pPr marL="171450" indent="-171450">
               <a:spcAft>
                 <a:spcPts val="500"/>
               </a:spcAft>
-              <a:buSzPct val="100000"/>
+              <a:buFont typeface="Arial" panose="020B0604020202020204" pitchFamily="34" charset="0"/>
               <a:buChar char="•"/>
             </a:pPr>
             <a:r>
-              <a:rPr lang="en-US" sz="1150" dirty="0">
-                <a:solidFill>
-                  <a:srgbClr val="222222"/>
-                </a:solidFill>
-              </a:rPr>
-              <a:t>Arıza kayıtlarını yönetir.</a:t>
+              <a:rPr lang="tr-TR" sz="1200" b="1" dirty="0"/>
+              <a:t>Bilgi İşlem (Admin):</a:t>
             </a:r>
-            <a:endParaRPr lang="en-US" sz="1150" dirty="0"/>
+            <a:r>
+              <a:rPr lang="tr-TR" sz="1200" dirty="0"/>
+              <a:t> Gelen arızaları listeler ve "İşleme Alındı / Çözüldü" olarak günceller.</a:t>
+            </a:r>
           </a:p>
           <a:p>
-            <a:pPr marL="342900" indent="-342900">
+            <a:pPr>
               <a:spcAft>
                 <a:spcPts val="500"/>
               </a:spcAft>
-              <a:buSzPct val="100000"/>
-              <a:buChar char="•"/>
             </a:pPr>
-            <a:r>
-              <a:rPr lang="en-US" sz="1150" dirty="0">
-                <a:solidFill>
-                  <a:srgbClr val="222222"/>
-                </a:solidFill>
-              </a:rPr>
-              <a:t>Durumu Beklemede / İşleme Alındı / Çözüldü olarak günceller.</a:t>
-            </a:r>
-            <a:endParaRPr lang="en-US" sz="1150" dirty="0"/>
+            <a:endParaRPr lang="tr-TR" sz="1200" dirty="0"/>
           </a:p>
           <a:p>
-            <a:pPr marL="0" indent="0">
+            <a:pPr>
               <a:spcAft>
                 <a:spcPts val="500"/>
               </a:spcAft>
-              <a:buNone/>
             </a:pPr>
-            <a:r>
-              <a:rPr lang="en-US" sz="1150" b="1" dirty="0">
-                <a:solidFill>
-                  <a:srgbClr val="222222"/>
-                </a:solidFill>
-              </a:rPr>
-              <a:t>Öğrenci ve Akademisyen (Kullanıcı)</a:t>
-            </a:r>
-            <a:endParaRPr lang="en-US" sz="1150" dirty="0"/>
-          </a:p>
-          <a:p>
-            <a:pPr marL="342900" indent="-342900">
-              <a:spcAft>
-                <a:spcPts val="500"/>
-              </a:spcAft>
-              <a:buSzPct val="100000"/>
-              <a:buChar char="•"/>
-            </a:pPr>
-            <a:r>
-              <a:rPr lang="en-US" sz="1150" dirty="0">
-                <a:solidFill>
-                  <a:srgbClr val="222222"/>
-                </a:solidFill>
-              </a:rPr>
-              <a:t>Sisteme kayıt olur, oturum açar.</a:t>
-            </a:r>
-            <a:endParaRPr lang="en-US" sz="1150" dirty="0"/>
-          </a:p>
-          <a:p>
-            <a:pPr marL="342900" indent="-342900">
-              <a:spcAft>
-                <a:spcPts val="500"/>
-              </a:spcAft>
-              <a:buSzPct val="100000"/>
-              <a:buChar char="•"/>
-            </a:pPr>
-            <a:r>
-              <a:rPr lang="en-US" sz="1150" dirty="0">
-                <a:solidFill>
-                  <a:srgbClr val="222222"/>
-                </a:solidFill>
-              </a:rPr>
-              <a:t>Konum ve fotoğraf ekleyerek arıza kaydı oluşturur.</a:t>
-            </a:r>
-            <a:endParaRPr lang="en-US" sz="1150" dirty="0"/>
-          </a:p>
-          <a:p>
-            <a:pPr marL="342900" indent="-342900">
-              <a:spcAft>
-                <a:spcPts val="500"/>
-              </a:spcAft>
-              <a:buSzPct val="100000"/>
-              <a:buChar char="•"/>
-            </a:pPr>
-            <a:r>
-              <a:rPr lang="en-US" sz="1150" dirty="0">
-                <a:solidFill>
-                  <a:srgbClr val="222222"/>
-                </a:solidFill>
-              </a:rPr>
-              <a:t>Kendi kayıtlarının durumunu takip eder.</a:t>
-            </a:r>
             <a:endParaRPr lang="en-US" sz="1150" dirty="0"/>
           </a:p>
         </p:txBody>
@@ -2230,132 +2156,65 @@
           <a:bodyPr wrap="square" lIns="0" tIns="0" rIns="0" bIns="0" rtlCol="0" anchor="t"/>
           <a:lstStyle/>
           <a:p>
-            <a:pPr marL="342900" indent="-342900">
+            <a:pPr marL="171450" indent="-171450">
               <a:spcAft>
                 <a:spcPts val="500"/>
               </a:spcAft>
               <a:buSzPct val="100000"/>
+              <a:buFont typeface="Arial" panose="020B0604020202020204" pitchFamily="34" charset="0"/>
               <a:buChar char="•"/>
             </a:pPr>
             <a:r>
-              <a:rPr lang="en-US" sz="1150" b="1" dirty="0">
-                <a:solidFill>
-                  <a:srgbClr val="222222"/>
-                </a:solidFill>
-              </a:rPr>
-              <a:t>Güvenlik: </a:t>
+              <a:rPr lang="tr-TR" sz="1200" b="1" dirty="0"/>
+              <a:t>Güvenlik:</a:t>
             </a:r>
             <a:r>
-              <a:rPr lang="en-US" sz="1150" dirty="0">
-                <a:solidFill>
-                  <a:srgbClr val="222222"/>
-                </a:solidFill>
-              </a:rPr>
-              <a:t>Hash'li şifre, rol bazlı erişim</a:t>
+              <a:rPr lang="tr-TR" sz="1200" dirty="0"/>
+              <a:t> Şifreler düz metin değil, kriptolu (</a:t>
             </a:r>
-            <a:endParaRPr lang="en-US" sz="1150" dirty="0"/>
+            <a:r>
+              <a:rPr lang="tr-TR" sz="1200" dirty="0" err="1"/>
+              <a:t>Hash</a:t>
+            </a:r>
+            <a:r>
+              <a:rPr lang="tr-TR" sz="1200" dirty="0"/>
+              <a:t>) olarak saklanır.</a:t>
+            </a:r>
           </a:p>
           <a:p>
-            <a:pPr marL="342900" indent="-342900">
+            <a:pPr marL="171450" indent="-171450">
               <a:spcAft>
                 <a:spcPts val="500"/>
               </a:spcAft>
               <a:buSzPct val="100000"/>
+              <a:buFont typeface="Arial" panose="020B0604020202020204" pitchFamily="34" charset="0"/>
               <a:buChar char="•"/>
             </a:pPr>
             <a:r>
-              <a:rPr lang="en-US" sz="1150" b="1" dirty="0">
-                <a:solidFill>
-                  <a:srgbClr val="222222"/>
-                </a:solidFill>
-              </a:rPr>
-              <a:t>Performans: </a:t>
+              <a:rPr lang="tr-TR" sz="1200" b="1" dirty="0"/>
+              <a:t>Performans:</a:t>
             </a:r>
             <a:r>
-              <a:rPr lang="en-US" sz="1150" dirty="0">
-                <a:solidFill>
-                  <a:srgbClr val="222222"/>
-                </a:solidFill>
-              </a:rPr>
-              <a:t>Görsel boyutu en fazla 2 MB</a:t>
+              <a:rPr lang="tr-TR" sz="1200" dirty="0"/>
+              <a:t> Sunucu yorulmasın diye fotoğraflara maksimum 2 MB sınırı uygulanır.</a:t>
             </a:r>
-            <a:endParaRPr lang="en-US" sz="1150" dirty="0"/>
           </a:p>
           <a:p>
-            <a:pPr marL="342900" indent="-342900">
+            <a:pPr marL="171450" indent="-171450">
               <a:spcAft>
                 <a:spcPts val="500"/>
               </a:spcAft>
               <a:buSzPct val="100000"/>
+              <a:buFont typeface="Arial" panose="020B0604020202020204" pitchFamily="34" charset="0"/>
               <a:buChar char="•"/>
             </a:pPr>
             <a:r>
-              <a:rPr lang="en-US" sz="1150" b="1" dirty="0">
-                <a:solidFill>
-                  <a:srgbClr val="222222"/>
-                </a:solidFill>
-              </a:rPr>
-              <a:t>Erişilebilirlik: </a:t>
+              <a:rPr lang="tr-TR" sz="1200" b="1" dirty="0"/>
+              <a:t>Kullanılabilirlik:</a:t>
             </a:r>
             <a:r>
-              <a:rPr lang="en-US" sz="1150" dirty="0">
-                <a:solidFill>
-                  <a:srgbClr val="222222"/>
-                </a:solidFill>
-              </a:rPr>
-              <a:t>Bulutta canlı, tarayıcıdan erişim</a:t>
-            </a:r>
-            <a:endParaRPr lang="en-US" sz="1150" dirty="0"/>
-          </a:p>
-          <a:p>
-            <a:pPr marL="342900" indent="-342900">
-              <a:spcAft>
-                <a:spcPts val="500"/>
-              </a:spcAft>
-              <a:buSzPct val="100000"/>
-              <a:buChar char="•"/>
-            </a:pPr>
-            <a:r>
-              <a:rPr lang="en-US" sz="1150" b="1" dirty="0">
-                <a:solidFill>
-                  <a:srgbClr val="222222"/>
-                </a:solidFill>
-              </a:rPr>
-              <a:t>Kullanılabilirlik: </a:t>
-            </a:r>
-            <a:r>
-              <a:rPr lang="en-US" sz="1150" dirty="0">
-                <a:solidFill>
-                  <a:srgbClr val="222222"/>
-                </a:solidFill>
-              </a:rPr>
-              <a:t>Sade ve hızlı arayüz</a:t>
-            </a:r>
-            <a:endParaRPr lang="en-US" sz="1150" dirty="0"/>
-          </a:p>
-          <a:p>
-            <a:pPr marL="342900" indent="-342900">
-              <a:spcAft>
-                <a:spcPts val="500"/>
-              </a:spcAft>
-              <a:buSzPct val="100000"/>
-              <a:buChar char="•"/>
-            </a:pPr>
-            <a:r>
-              <a:rPr lang="en-US" sz="1150" b="1" dirty="0">
-                <a:solidFill>
-                  <a:srgbClr val="222222"/>
-                </a:solidFill>
-              </a:rPr>
-              <a:t>Veri bütünlüğü: </a:t>
-            </a:r>
-            <a:r>
-              <a:rPr lang="en-US" sz="1150" dirty="0">
-                <a:solidFill>
-                  <a:srgbClr val="222222"/>
-                </a:solidFill>
-              </a:rPr>
-              <a:t>İlişkisel veri yapısı</a:t>
+              <a:rPr lang="tr-TR" sz="1200" dirty="0"/>
+              <a:t> Bulut tabanlıdır, tarayıcı olan her cihazdan hızlıca erişilir.</a:t>
             </a:r>
             <a:endParaRPr lang="en-US" sz="1150" dirty="0"/>
           </a:p>
@@ -2382,59 +2241,57 @@
           <a:bodyPr wrap="square" lIns="0" tIns="0" rIns="0" bIns="0" rtlCol="0" anchor="t"/>
           <a:lstStyle/>
           <a:p>
-            <a:pPr marL="342900" indent="-342900">
+            <a:pPr marL="171450" indent="-171450">
               <a:spcAft>
                 <a:spcPts val="500"/>
               </a:spcAft>
               <a:buSzPct val="100000"/>
-              <a:buFont typeface="+mj-lt"/>
-              <a:buAutoNum type="arabicPeriod"/>
+              <a:buFont typeface="Arial" panose="020B0604020202020204" pitchFamily="34" charset="0"/>
+              <a:buChar char="•"/>
             </a:pPr>
             <a:r>
-              <a:rPr lang="en-US" sz="1150" dirty="0">
-                <a:solidFill>
-                  <a:srgbClr val="222222"/>
-                </a:solidFill>
-              </a:rPr>
-              <a:t>Rol Tabanlı Yetkilendirme (Admin / Kullanıcı)</a:t>
+              <a:rPr lang="tr-TR" sz="1200" b="1" dirty="0"/>
+              <a:t>Rol Yapısı:</a:t>
             </a:r>
-            <a:endParaRPr lang="en-US" sz="1150" dirty="0"/>
+            <a:r>
+              <a:rPr lang="tr-TR" sz="1200" dirty="0"/>
+              <a:t> Admin ve Normal Kullanıcı yetkileri kesin çizgilerle ayrılır.</a:t>
+            </a:r>
           </a:p>
           <a:p>
-            <a:pPr marL="342900" indent="-342900">
+            <a:pPr marL="171450" indent="-171450">
               <a:spcAft>
                 <a:spcPts val="500"/>
               </a:spcAft>
               <a:buSzPct val="100000"/>
-              <a:buFont typeface="+mj-lt"/>
-              <a:buAutoNum type="arabicPeriod"/>
+              <a:buFont typeface="Arial" panose="020B0604020202020204" pitchFamily="34" charset="0"/>
+              <a:buChar char="•"/>
             </a:pPr>
             <a:r>
-              <a:rPr lang="en-US" sz="1150" dirty="0">
-                <a:solidFill>
-                  <a:srgbClr val="222222"/>
-                </a:solidFill>
-              </a:rPr>
-              <a:t>Görsel Yükleme (arızalı cihaz fotoğrafı)</a:t>
+              <a:rPr lang="tr-TR" sz="1200" b="1" dirty="0"/>
+              <a:t>Dosya Yükleme:</a:t>
             </a:r>
-            <a:endParaRPr lang="en-US" sz="1150" dirty="0"/>
+            <a:r>
+              <a:rPr lang="tr-TR" sz="1200" dirty="0"/>
+              <a:t> Arızalı cihazı kanıtlamak için sisteme görsel yüklenir.</a:t>
+            </a:r>
           </a:p>
           <a:p>
-            <a:pPr marL="342900" indent="-342900">
+            <a:pPr marL="171450" indent="-171450">
               <a:spcAft>
                 <a:spcPts val="500"/>
               </a:spcAft>
               <a:buSzPct val="100000"/>
-              <a:buFont typeface="+mj-lt"/>
-              <a:buAutoNum type="arabicPeriod"/>
+              <a:buFont typeface="Arial" panose="020B0604020202020204" pitchFamily="34" charset="0"/>
+              <a:buChar char="•"/>
             </a:pPr>
             <a:r>
-              <a:rPr lang="en-US" sz="1150" dirty="0">
-                <a:solidFill>
-                  <a:srgbClr val="222222"/>
-                </a:solidFill>
-              </a:rPr>
-              <a:t>Raporlama/Grafik: en çok arıza veren laboratuvarlar, çözülen/bekleyen arıza oranları</a:t>
+              <a:rPr lang="tr-TR" sz="1200" b="1" dirty="0"/>
+              <a:t>Raporlama/Grafik:</a:t>
+            </a:r>
+            <a:r>
+              <a:rPr lang="tr-TR" sz="1200" dirty="0"/>
+              <a:t> Admin panelinde "En çok arıza veren yerler" grafikleri yer alır.</a:t>
             </a:r>
             <a:endParaRPr lang="en-US" sz="1150" dirty="0"/>
           </a:p>
@@ -11772,7 +11629,7 @@
           <p:nvPr>
             <p:extLst>
               <p:ext uri="{D42A27DB-BD31-4B8C-83A1-F6EECF244321}">
-                <p14:modId xmlns:p14="http://schemas.microsoft.com/office/powerpoint/2010/main" val="1579011935"/>
+                <p14:modId xmlns:p14="http://schemas.microsoft.com/office/powerpoint/2010/main" val="4190271241"/>
               </p:ext>
             </p:extLst>
           </p:nvPr>
@@ -12264,7 +12121,23 @@
                             <a:srgbClr val="222222"/>
                           </a:solidFill>
                         </a:rPr>
-                        <a:t>Üyelik yalnızca "kostu.edu.tr" uzantılı e-postalarla yapılacaktır.</a:t>
+                        <a:t>Üyelik yalnızca "ko</a:t>
+                      </a:r>
+                      <a:r>
+                        <a:rPr lang="tr-TR" sz="1000" dirty="0" err="1">
+                          <a:solidFill>
+                            <a:srgbClr val="222222"/>
+                          </a:solidFill>
+                        </a:rPr>
+                        <a:t>caelisaglik</a:t>
+                      </a:r>
+                      <a:r>
+                        <a:rPr lang="en-US" sz="1000" dirty="0">
+                          <a:solidFill>
+                            <a:srgbClr val="222222"/>
+                          </a:solidFill>
+                        </a:rPr>
+                        <a:t>.edu.tr" uzantılı e-postalarla yapılacaktır.</a:t>
                       </a:r>
                       <a:endParaRPr lang="en-US" sz="1000" dirty="0"/>
                     </a:p>
